--- a/assets/Overview2.pptx
+++ b/assets/Overview2.pptx
@@ -254,7 +254,7 @@
           <a:p>
             <a:fld id="{D997B5FA-0921-464F-AAE1-844C04324D75}" type="datetimeFigureOut">
               <a:rPr lang="zh-CN" altLang="en-US" smtClean="0"/>
-              <a:t>2026/4/2</a:t>
+              <a:t>2026/4/3</a:t>
             </a:fld>
             <a:endParaRPr lang="zh-CN" altLang="en-US"/>
           </a:p>
@@ -424,7 +424,7 @@
           <a:p>
             <a:fld id="{D997B5FA-0921-464F-AAE1-844C04324D75}" type="datetimeFigureOut">
               <a:rPr lang="zh-CN" altLang="en-US" smtClean="0"/>
-              <a:t>2026/4/2</a:t>
+              <a:t>2026/4/3</a:t>
             </a:fld>
             <a:endParaRPr lang="zh-CN" altLang="en-US"/>
           </a:p>
@@ -604,7 +604,7 @@
           <a:p>
             <a:fld id="{D997B5FA-0921-464F-AAE1-844C04324D75}" type="datetimeFigureOut">
               <a:rPr lang="zh-CN" altLang="en-US" smtClean="0"/>
-              <a:t>2026/4/2</a:t>
+              <a:t>2026/4/3</a:t>
             </a:fld>
             <a:endParaRPr lang="zh-CN" altLang="en-US"/>
           </a:p>
@@ -774,7 +774,7 @@
           <a:p>
             <a:fld id="{D997B5FA-0921-464F-AAE1-844C04324D75}" type="datetimeFigureOut">
               <a:rPr lang="zh-CN" altLang="en-US" smtClean="0"/>
-              <a:t>2026/4/2</a:t>
+              <a:t>2026/4/3</a:t>
             </a:fld>
             <a:endParaRPr lang="zh-CN" altLang="en-US"/>
           </a:p>
@@ -1020,7 +1020,7 @@
           <a:p>
             <a:fld id="{D997B5FA-0921-464F-AAE1-844C04324D75}" type="datetimeFigureOut">
               <a:rPr lang="zh-CN" altLang="en-US" smtClean="0"/>
-              <a:t>2026/4/2</a:t>
+              <a:t>2026/4/3</a:t>
             </a:fld>
             <a:endParaRPr lang="zh-CN" altLang="en-US"/>
           </a:p>
@@ -1252,7 +1252,7 @@
           <a:p>
             <a:fld id="{D997B5FA-0921-464F-AAE1-844C04324D75}" type="datetimeFigureOut">
               <a:rPr lang="zh-CN" altLang="en-US" smtClean="0"/>
-              <a:t>2026/4/2</a:t>
+              <a:t>2026/4/3</a:t>
             </a:fld>
             <a:endParaRPr lang="zh-CN" altLang="en-US"/>
           </a:p>
@@ -1619,7 +1619,7 @@
           <a:p>
             <a:fld id="{D997B5FA-0921-464F-AAE1-844C04324D75}" type="datetimeFigureOut">
               <a:rPr lang="zh-CN" altLang="en-US" smtClean="0"/>
-              <a:t>2026/4/2</a:t>
+              <a:t>2026/4/3</a:t>
             </a:fld>
             <a:endParaRPr lang="zh-CN" altLang="en-US"/>
           </a:p>
@@ -1737,7 +1737,7 @@
           <a:p>
             <a:fld id="{D997B5FA-0921-464F-AAE1-844C04324D75}" type="datetimeFigureOut">
               <a:rPr lang="zh-CN" altLang="en-US" smtClean="0"/>
-              <a:t>2026/4/2</a:t>
+              <a:t>2026/4/3</a:t>
             </a:fld>
             <a:endParaRPr lang="zh-CN" altLang="en-US"/>
           </a:p>
@@ -1832,7 +1832,7 @@
           <a:p>
             <a:fld id="{D997B5FA-0921-464F-AAE1-844C04324D75}" type="datetimeFigureOut">
               <a:rPr lang="zh-CN" altLang="en-US" smtClean="0"/>
-              <a:t>2026/4/2</a:t>
+              <a:t>2026/4/3</a:t>
             </a:fld>
             <a:endParaRPr lang="zh-CN" altLang="en-US"/>
           </a:p>
@@ -2109,7 +2109,7 @@
           <a:p>
             <a:fld id="{D997B5FA-0921-464F-AAE1-844C04324D75}" type="datetimeFigureOut">
               <a:rPr lang="zh-CN" altLang="en-US" smtClean="0"/>
-              <a:t>2026/4/2</a:t>
+              <a:t>2026/4/3</a:t>
             </a:fld>
             <a:endParaRPr lang="zh-CN" altLang="en-US"/>
           </a:p>
@@ -2366,7 +2366,7 @@
           <a:p>
             <a:fld id="{D997B5FA-0921-464F-AAE1-844C04324D75}" type="datetimeFigureOut">
               <a:rPr lang="zh-CN" altLang="en-US" smtClean="0"/>
-              <a:t>2026/4/2</a:t>
+              <a:t>2026/4/3</a:t>
             </a:fld>
             <a:endParaRPr lang="zh-CN" altLang="en-US"/>
           </a:p>
@@ -2579,7 +2579,7 @@
           <a:p>
             <a:fld id="{D997B5FA-0921-464F-AAE1-844C04324D75}" type="datetimeFigureOut">
               <a:rPr lang="zh-CN" altLang="en-US" smtClean="0"/>
-              <a:t>2026/4/2</a:t>
+              <a:t>2026/4/3</a:t>
             </a:fld>
             <a:endParaRPr lang="zh-CN" altLang="en-US"/>
           </a:p>
@@ -3223,8 +3223,8 @@
         </p:nvSpPr>
         <p:spPr>
           <a:xfrm>
-            <a:off x="10233308" y="3721385"/>
-            <a:ext cx="3634022" cy="2252068"/>
+            <a:off x="10230868" y="3669585"/>
+            <a:ext cx="3659776" cy="2303868"/>
           </a:xfrm>
           <a:prstGeom prst="roundRect">
             <a:avLst>
@@ -8000,8 +8000,8 @@
         </p:nvSpPr>
         <p:spPr>
           <a:xfrm>
-            <a:off x="10261657" y="439791"/>
-            <a:ext cx="3597334" cy="2837263"/>
+            <a:off x="10244296" y="439791"/>
+            <a:ext cx="3646348" cy="2837263"/>
           </a:xfrm>
           <a:prstGeom prst="roundRect">
             <a:avLst>
@@ -11199,8 +11199,8 @@
         </p:nvSpPr>
         <p:spPr>
           <a:xfrm>
-            <a:off x="10056836" y="3770239"/>
-            <a:ext cx="3935389" cy="369332"/>
+            <a:off x="10179754" y="3763823"/>
+            <a:ext cx="3784543" cy="369332"/>
           </a:xfrm>
           <a:prstGeom prst="rect">
             <a:avLst/>
@@ -11216,7 +11216,7 @@
             <a:pPr algn="ctr"/>
             <a:r>
               <a:rPr lang="en-US" altLang="zh-CN" b="1"/>
-              <a:t>Inclusion Relation Checking</a:t>
+              <a:t>Approximate State Relation Checking</a:t>
             </a:r>
           </a:p>
         </p:txBody>
@@ -11235,7 +11235,7 @@
         </p:nvSpPr>
         <p:spPr>
           <a:xfrm>
-            <a:off x="10366979" y="4068918"/>
+            <a:off x="10296297" y="4076128"/>
             <a:ext cx="3441946" cy="285335"/>
           </a:xfrm>
           <a:prstGeom prst="rect">
